--- a/docs/assets/zip0-pitch.pptx
+++ b/docs/assets/zip0-pitch.pptx
@@ -12,9 +12,10 @@
     <p:sldId id="260" r:id="rId6"/>
     <p:sldId id="261" r:id="rId7"/>
     <p:sldId id="262" r:id="rId8"/>
+    <p:sldId id="263" r:id="rId9"/>
   </p:sldIdLst>
   <p:notesMasterIdLst>
-    <p:notesMasterId r:id="rId9"/>
+    <p:notesMasterId r:id="rId10"/>
   </p:notesMasterIdLst>
   <p:sldSz cx="9144000" cy="5143500"/>
   <p:notesSz cx="5143500" cy="9144000"/>
@@ -1036,7 +1037,7 @@
           <a:p>
             <a:r>
               <a:rPr lang="en-US" dirty="0"/>
-              <a:t>End on the line. Do not add a thank-you sentence after it.</a:t>
+              <a:t>Name the team. Five people, and every one of these contributions is in the commit history — do not inflate the roles.</a:t>
             </a:r>
             <a:endParaRPr lang="en-US" dirty="0"/>
           </a:p>
@@ -1060,6 +1061,94 @@
             <a:fld id="{F7021451-1387-4CA6-816F-3879F97B5CBC}" type="slidenum">
               <a:rPr lang="en-US"/>
               <a:t>7</a:t>
+            </a:fld>
+            <a:endParaRPr lang="en-US"/>
+          </a:p>
+        </p:txBody>
+      </p:sp>
+    </p:spTree>
+    <p:extLst>
+      <p:ext uri="{BB962C8B-B14F-4D97-AF65-F5344CB8AC3E}">
+        <p14:creationId xmlns:p14="http://schemas.microsoft.com/office/powerpoint/2010/main" val="1024086991"/>
+      </p:ext>
+    </p:extLst>
+  </p:cSld>
+  <p:clrMapOvr>
+    <a:masterClrMapping/>
+  </p:clrMapOvr>
+</p:notes>
+</file>
+
+<file path=ppt/notesSlides/notesSlide8.xml><?xml version="1.0" encoding="utf-8"?>
+<p:notes xmlns:a="http://schemas.openxmlformats.org/drawingml/2006/main" xmlns:r="http://schemas.openxmlformats.org/officeDocument/2006/relationships" xmlns:p="http://schemas.openxmlformats.org/presentationml/2006/main">
+  <p:cSld>
+    <p:spTree>
+      <p:nvGrpSpPr>
+        <p:cNvPr id="1" name=""/>
+        <p:cNvGrpSpPr/>
+        <p:nvPr/>
+      </p:nvGrpSpPr>
+      <p:grpSpPr>
+        <a:xfrm>
+          <a:off x="0" y="0"/>
+          <a:ext cx="0" cy="0"/>
+          <a:chOff x="0" y="0"/>
+          <a:chExt cx="0" cy="0"/>
+        </a:xfrm>
+      </p:grpSpPr>
+      <p:sp>
+        <p:nvSpPr>
+          <p:cNvPr id="2" name="Slide Image Placeholder 1"/>
+          <p:cNvSpPr>
+            <a:spLocks noGrp="1" noRot="1" noChangeAspect="1"/>
+          </p:cNvSpPr>
+          <p:nvPr>
+            <p:ph type="sldImg"/>
+          </p:nvPr>
+        </p:nvSpPr>
+        <p:spPr/>
+      </p:sp>
+      <p:sp>
+        <p:nvSpPr>
+          <p:cNvPr id="3" name="Notes Placeholder 2"/>
+          <p:cNvSpPr>
+            <a:spLocks noGrp="1"/>
+          </p:cNvSpPr>
+          <p:nvPr>
+            <p:ph type="body" idx="1"/>
+          </p:nvPr>
+        </p:nvSpPr>
+        <p:spPr/>
+        <p:txBody>
+          <a:bodyPr/>
+          <a:lstStyle/>
+          <a:p>
+            <a:r>
+              <a:rPr lang="en-US" dirty="0"/>
+              <a:t>End on the line. Do not add a thank-you sentence after it.</a:t>
+            </a:r>
+            <a:endParaRPr lang="en-US" dirty="0"/>
+          </a:p>
+        </p:txBody>
+      </p:sp>
+      <p:sp>
+        <p:nvSpPr>
+          <p:cNvPr id="4" name="Slide Number Placeholder 3"/>
+          <p:cNvSpPr>
+            <a:spLocks noGrp="1"/>
+          </p:cNvSpPr>
+          <p:nvPr>
+            <p:ph type="sldNum" sz="quarter" idx="10"/>
+          </p:nvPr>
+        </p:nvSpPr>
+        <p:spPr/>
+        <p:txBody>
+          <a:bodyPr/>
+          <a:lstStyle/>
+          <a:p>
+            <a:fld id="{F7021451-1387-4CA6-816F-3879F97B5CBC}" type="slidenum">
+              <a:rPr lang="en-US"/>
+              <a:t>8</a:t>
             </a:fld>
             <a:endParaRPr lang="en-US"/>
           </a:p>
@@ -1434,44 +1523,124 @@
           </a:ln>
         </p:spPr>
       </p:sp>
-      <p:sp>
-        <p:nvSpPr>
-          <p:cNvPr id="4" name="Shape 1"/>
-          <p:cNvSpPr/>
-          <p:nvPr/>
-        </p:nvSpPr>
-        <p:spPr>
-          <a:xfrm>
-            <a:off x="868680" y="2331720"/>
-            <a:ext cx="1143000" cy="1143000"/>
-          </a:xfrm>
-          <a:prstGeom prst="ellipse">
-            <a:avLst/>
-          </a:prstGeom>
-          <a:ln w="108585">
-            <a:solidFill>
-              <a:srgbClr val="4B86FF"/>
-            </a:solidFill>
-            <a:prstDash val="solid"/>
-          </a:ln>
-        </p:spPr>
-      </p:sp>
-      <p:sp>
-        <p:nvSpPr>
-          <p:cNvPr id="5" name="Shape 2"/>
-          <p:cNvSpPr/>
-          <p:nvPr/>
-        </p:nvSpPr>
-        <p:spPr>
-          <a:xfrm>
-            <a:off x="708660" y="2805494"/>
-            <a:ext cx="1463040" cy="195453"/>
-          </a:xfrm>
-          <a:prstGeom prst="rect">
-            <a:avLst/>
-          </a:prstGeom>
-          <a:solidFill>
-            <a:srgbClr val="0A0E14"/>
+      <p:pic>
+        <p:nvPicPr>
+          <p:cNvPr id="4" name="Image 0" descr="preencoded.png">    </p:cNvPr>
+          <p:cNvPicPr>
+            <a:picLocks noChangeAspect="1"/>
+          </p:cNvPicPr>
+          <p:nvPr/>
+        </p:nvPicPr>
+        <p:blipFill>
+          <a:blip r:embed="rId1"/>
+          <a:stretch>
+            <a:fillRect/>
+          </a:stretch>
+        </p:blipFill>
+        <p:spPr>
+          <a:xfrm>
+            <a:off x="868680" y="2286000"/>
+            <a:ext cx="1188720" cy="1188720"/>
+          </a:xfrm>
+          <a:prstGeom prst="rect">
+            <a:avLst/>
+          </a:prstGeom>
+        </p:spPr>
+      </p:pic>
+      <p:sp>
+        <p:nvSpPr>
+          <p:cNvPr id="5" name="Text 1"/>
+          <p:cNvSpPr/>
+          <p:nvPr/>
+        </p:nvSpPr>
+        <p:spPr>
+          <a:xfrm>
+            <a:off x="2473452" y="2095805"/>
+            <a:ext cx="5486400" cy="1545336"/>
+          </a:xfrm>
+          <a:prstGeom prst="rect">
+            <a:avLst/>
+          </a:prstGeom>
+          <a:noFill/>
+          <a:ln/>
+        </p:spPr>
+        <p:txBody>
+          <a:bodyPr wrap="square" rtlCol="0" anchor="ctr"/>
+          <a:lstStyle/>
+          <a:p>
+            <a:pPr indent="0" marL="0">
+              <a:buNone/>
+            </a:pPr>
+            <a:r>
+              <a:rPr lang="en-US" sz="6600" b="1" spc="200" kern="0" dirty="0">
+                <a:solidFill>
+                  <a:srgbClr val="E6EAF0"/>
+                </a:solidFill>
+                <a:latin typeface="Georgia" pitchFamily="34" charset="0"/>
+                <a:ea typeface="Georgia" pitchFamily="34" charset="-122"/>
+                <a:cs typeface="Georgia" pitchFamily="34" charset="-120"/>
+              </a:rPr>
+              <a:t>ZIP·0</a:t>
+            </a:r>
+            <a:endParaRPr lang="en-US" sz="6600" dirty="0"/>
+          </a:p>
+        </p:txBody>
+      </p:sp>
+      <p:sp>
+        <p:nvSpPr>
+          <p:cNvPr id="6" name="Text 2"/>
+          <p:cNvSpPr/>
+          <p:nvPr/>
+        </p:nvSpPr>
+        <p:spPr>
+          <a:xfrm>
+            <a:off x="868680" y="4069080"/>
+            <a:ext cx="7772400" cy="548640"/>
+          </a:xfrm>
+          <a:prstGeom prst="rect">
+            <a:avLst/>
+          </a:prstGeom>
+          <a:noFill/>
+          <a:ln/>
+        </p:spPr>
+        <p:txBody>
+          <a:bodyPr wrap="square" rtlCol="0" anchor="ctr"/>
+          <a:lstStyle/>
+          <a:p>
+            <a:pPr indent="0" marL="0">
+              <a:buNone/>
+            </a:pPr>
+            <a:r>
+              <a:rPr lang="en-US" sz="2000" dirty="0">
+                <a:solidFill>
+                  <a:srgbClr val="96A3B5"/>
+                </a:solidFill>
+                <a:latin typeface="Georgia" pitchFamily="34" charset="0"/>
+                <a:ea typeface="Georgia" pitchFamily="34" charset="-122"/>
+                <a:cs typeface="Georgia" pitchFamily="34" charset="-120"/>
+              </a:rPr>
+              <a:t>Cross-border settlement for institutions that cannot hold crypto.</a:t>
+            </a:r>
+            <a:endParaRPr lang="en-US" sz="2000" dirty="0"/>
+          </a:p>
+        </p:txBody>
+      </p:sp>
+      <p:sp>
+        <p:nvSpPr>
+          <p:cNvPr id="7" name="Shape 3"/>
+          <p:cNvSpPr/>
+          <p:nvPr/>
+        </p:nvSpPr>
+        <p:spPr>
+          <a:xfrm>
+            <a:off x="868680" y="6053328"/>
+            <a:ext cx="10454335" cy="10973"/>
+          </a:xfrm>
+          <a:prstGeom prst="rect">
+            <a:avLst/>
+          </a:prstGeom>
+          <a:solidFill>
+            <a:srgbClr val="243040"/>
           </a:solidFill>
           <a:ln w="12700">
             <a:solidFill>
@@ -1483,135 +1652,7 @@
       </p:sp>
       <p:sp>
         <p:nvSpPr>
-          <p:cNvPr id="6" name="Shape 3"/>
-          <p:cNvSpPr/>
-          <p:nvPr/>
-        </p:nvSpPr>
-        <p:spPr>
-          <a:xfrm>
-            <a:off x="708660" y="2848927"/>
-            <a:ext cx="1463040" cy="108585"/>
-          </a:xfrm>
-          <a:prstGeom prst="rect">
-            <a:avLst/>
-          </a:prstGeom>
-          <a:solidFill>
-            <a:srgbClr val="4B86FF"/>
-          </a:solidFill>
-          <a:ln w="12700">
-            <a:solidFill>
-              <a:srgbClr val="333333"/>
-            </a:solidFill>
-            <a:prstDash val="solid"/>
-          </a:ln>
-        </p:spPr>
-      </p:sp>
-      <p:sp>
-        <p:nvSpPr>
-          <p:cNvPr id="7" name="Text 4"/>
-          <p:cNvSpPr/>
-          <p:nvPr/>
-        </p:nvSpPr>
-        <p:spPr>
-          <a:xfrm>
-            <a:off x="2468880" y="2286000"/>
-            <a:ext cx="4572000" cy="1371600"/>
-          </a:xfrm>
-          <a:prstGeom prst="rect">
-            <a:avLst/>
-          </a:prstGeom>
-          <a:noFill/>
-          <a:ln/>
-        </p:spPr>
-        <p:txBody>
-          <a:bodyPr wrap="square" rtlCol="0" anchor="ctr"/>
-          <a:lstStyle/>
-          <a:p>
-            <a:pPr indent="0" marL="0">
-              <a:buNone/>
-            </a:pPr>
-            <a:r>
-              <a:rPr lang="en-US" sz="6600" b="1" spc="200" kern="0" dirty="0">
-                <a:solidFill>
-                  <a:srgbClr val="E6EAF0"/>
-                </a:solidFill>
-                <a:latin typeface="Georgia" pitchFamily="34" charset="0"/>
-                <a:ea typeface="Georgia" pitchFamily="34" charset="-122"/>
-                <a:cs typeface="Georgia" pitchFamily="34" charset="-120"/>
-              </a:rPr>
-              <a:t>ZIP·0</a:t>
-            </a:r>
-            <a:endParaRPr lang="en-US" sz="6600" dirty="0"/>
-          </a:p>
-        </p:txBody>
-      </p:sp>
-      <p:sp>
-        <p:nvSpPr>
-          <p:cNvPr id="8" name="Text 5"/>
-          <p:cNvSpPr/>
-          <p:nvPr/>
-        </p:nvSpPr>
-        <p:spPr>
-          <a:xfrm>
-            <a:off x="868680" y="3977640"/>
-            <a:ext cx="7772400" cy="548640"/>
-          </a:xfrm>
-          <a:prstGeom prst="rect">
-            <a:avLst/>
-          </a:prstGeom>
-          <a:noFill/>
-          <a:ln/>
-        </p:spPr>
-        <p:txBody>
-          <a:bodyPr wrap="square" rtlCol="0" anchor="ctr"/>
-          <a:lstStyle/>
-          <a:p>
-            <a:pPr indent="0" marL="0">
-              <a:buNone/>
-            </a:pPr>
-            <a:r>
-              <a:rPr lang="en-US" sz="2000" dirty="0">
-                <a:solidFill>
-                  <a:srgbClr val="96A3B5"/>
-                </a:solidFill>
-                <a:latin typeface="Georgia" pitchFamily="34" charset="0"/>
-                <a:ea typeface="Georgia" pitchFamily="34" charset="-122"/>
-                <a:cs typeface="Georgia" pitchFamily="34" charset="-120"/>
-              </a:rPr>
-              <a:t>Cross-border settlement for institutions that cannot hold crypto.</a:t>
-            </a:r>
-            <a:endParaRPr lang="en-US" sz="2000" dirty="0"/>
-          </a:p>
-        </p:txBody>
-      </p:sp>
-      <p:sp>
-        <p:nvSpPr>
-          <p:cNvPr id="9" name="Shape 6"/>
-          <p:cNvSpPr/>
-          <p:nvPr/>
-        </p:nvSpPr>
-        <p:spPr>
-          <a:xfrm>
-            <a:off x="868680" y="6053328"/>
-            <a:ext cx="10454335" cy="10973"/>
-          </a:xfrm>
-          <a:prstGeom prst="rect">
-            <a:avLst/>
-          </a:prstGeom>
-          <a:solidFill>
-            <a:srgbClr val="243040"/>
-          </a:solidFill>
-          <a:ln w="12700">
-            <a:solidFill>
-              <a:srgbClr val="333333"/>
-            </a:solidFill>
-            <a:prstDash val="solid"/>
-          </a:ln>
-        </p:spPr>
-      </p:sp>
-      <p:sp>
-        <p:nvSpPr>
-          <p:cNvPr id="10" name="Text 7"/>
+          <p:cNvPr id="8" name="Text 4"/>
           <p:cNvSpPr/>
           <p:nvPr/>
         </p:nvSpPr>
@@ -1650,7 +1691,7 @@
       </p:sp>
       <p:sp>
         <p:nvSpPr>
-          <p:cNvPr id="11" name="Text 8"/>
+          <p:cNvPr id="9" name="Text 5"/>
           <p:cNvSpPr/>
           <p:nvPr/>
         </p:nvSpPr>
@@ -2963,121 +3004,20 @@
       </p:sp>
       <p:sp>
         <p:nvSpPr>
-          <p:cNvPr id="5" name="Text 2"/>
-          <p:cNvSpPr/>
-          <p:nvPr/>
-        </p:nvSpPr>
-        <p:spPr>
-          <a:xfrm>
-            <a:off x="868680" y="2148840"/>
-            <a:ext cx="9144000" cy="1920240"/>
-          </a:xfrm>
-          <a:prstGeom prst="rect">
-            <a:avLst/>
-          </a:prstGeom>
-          <a:noFill/>
-          <a:ln/>
-        </p:spPr>
-        <p:txBody>
-          <a:bodyPr wrap="square" rtlCol="0" anchor="ctr"/>
-          <a:lstStyle/>
-          <a:p>
-            <a:pPr indent="0" marL="0">
-              <a:lnSpc>
-                <a:spcPts val="6000"/>
-              </a:lnSpc>
-              <a:buNone/>
-            </a:pPr>
-            <a:r>
-              <a:rPr lang="en-US" sz="5400" dirty="0">
-                <a:solidFill>
-                  <a:srgbClr val="E6EAF0"/>
-                </a:solidFill>
-                <a:latin typeface="Georgia" pitchFamily="34" charset="0"/>
-                <a:ea typeface="Georgia" pitchFamily="34" charset="-122"/>
-                <a:cs typeface="Georgia" pitchFamily="34" charset="-120"/>
-              </a:rPr>
-              <a:t>One rail.</a:t>
-            </a:r>
-            <a:endParaRPr lang="en-US" sz="5400" dirty="0"/>
-          </a:p>
-          <a:p>
-            <a:pPr indent="0" marL="0">
-              <a:lnSpc>
-                <a:spcPts val="6000"/>
-              </a:lnSpc>
-              <a:buNone/>
-            </a:pPr>
-            <a:r>
-              <a:rPr lang="en-US" sz="5400" dirty="0">
-                <a:solidFill>
-                  <a:srgbClr val="E6EAF0"/>
-                </a:solidFill>
-                <a:latin typeface="Georgia" pitchFamily="34" charset="0"/>
-                <a:ea typeface="Georgia" pitchFamily="34" charset="-122"/>
-                <a:cs typeface="Georgia" pitchFamily="34" charset="-120"/>
-              </a:rPr>
-              <a:t>No intermediaries.</a:t>
-            </a:r>
-            <a:endParaRPr lang="en-US" sz="5400" dirty="0"/>
-          </a:p>
-        </p:txBody>
-      </p:sp>
-      <p:sp>
-        <p:nvSpPr>
-          <p:cNvPr id="6" name="Text 3"/>
-          <p:cNvSpPr/>
-          <p:nvPr/>
-        </p:nvSpPr>
-        <p:spPr>
-          <a:xfrm>
-            <a:off x="868680" y="4343400"/>
-            <a:ext cx="7772400" cy="731520"/>
-          </a:xfrm>
-          <a:prstGeom prst="rect">
-            <a:avLst/>
-          </a:prstGeom>
-          <a:noFill/>
-          <a:ln/>
-        </p:spPr>
-        <p:txBody>
-          <a:bodyPr wrap="square" rtlCol="0" anchor="ctr"/>
-          <a:lstStyle/>
-          <a:p>
-            <a:pPr indent="0" marL="0">
-              <a:buNone/>
-            </a:pPr>
-            <a:r>
-              <a:rPr lang="en-US" sz="1900" dirty="0">
-                <a:solidFill>
-                  <a:srgbClr val="96A3B5"/>
-                </a:solidFill>
-                <a:latin typeface="Georgia" pitchFamily="34" charset="0"/>
-                <a:ea typeface="Georgia" pitchFamily="34" charset="-122"/>
-                <a:cs typeface="Georgia" pitchFamily="34" charset="-120"/>
-              </a:rPr>
-              <a:t>A settlement contract holds the funds. It locks on one side and releases on the other.</a:t>
-            </a:r>
-            <a:endParaRPr lang="en-US" sz="1900" dirty="0"/>
-          </a:p>
-        </p:txBody>
-      </p:sp>
-      <p:sp>
-        <p:nvSpPr>
-          <p:cNvPr id="7" name="Shape 4"/>
-          <p:cNvSpPr/>
-          <p:nvPr/>
-        </p:nvSpPr>
-        <p:spPr>
-          <a:xfrm>
-            <a:off x="868680" y="6053328"/>
-            <a:ext cx="10454335" cy="10973"/>
-          </a:xfrm>
-          <a:prstGeom prst="rect">
-            <a:avLst/>
-          </a:prstGeom>
-          <a:solidFill>
-            <a:srgbClr val="243040"/>
+          <p:cNvPr id="5" name="Shape 2"/>
+          <p:cNvSpPr/>
+          <p:nvPr/>
+        </p:nvSpPr>
+        <p:spPr>
+          <a:xfrm>
+            <a:off x="0" y="3073241"/>
+            <a:ext cx="5296662" cy="162877"/>
+          </a:xfrm>
+          <a:prstGeom prst="rect">
+            <a:avLst/>
+          </a:prstGeom>
+          <a:solidFill>
+            <a:srgbClr val="4B86FF"/>
           </a:solidFill>
           <a:ln w="12700">
             <a:solidFill>
@@ -3089,7 +3029,159 @@
       </p:sp>
       <p:sp>
         <p:nvSpPr>
-          <p:cNvPr id="8" name="Text 5"/>
+          <p:cNvPr id="6" name="Shape 3"/>
+          <p:cNvSpPr/>
+          <p:nvPr/>
+        </p:nvSpPr>
+        <p:spPr>
+          <a:xfrm>
+            <a:off x="6895033" y="3073241"/>
+            <a:ext cx="5296662" cy="162877"/>
+          </a:xfrm>
+          <a:prstGeom prst="rect">
+            <a:avLst/>
+          </a:prstGeom>
+          <a:solidFill>
+            <a:srgbClr val="4B86FF"/>
+          </a:solidFill>
+          <a:ln w="12700">
+            <a:solidFill>
+              <a:srgbClr val="333333"/>
+            </a:solidFill>
+            <a:prstDash val="solid"/>
+          </a:ln>
+        </p:spPr>
+      </p:sp>
+      <p:pic>
+        <p:nvPicPr>
+          <p:cNvPr id="7" name="Image 0" descr="preencoded.png">    </p:cNvPr>
+          <p:cNvPicPr>
+            <a:picLocks noChangeAspect="1"/>
+          </p:cNvPicPr>
+          <p:nvPr/>
+        </p:nvPicPr>
+        <p:blipFill>
+          <a:blip r:embed="rId1"/>
+          <a:stretch>
+            <a:fillRect/>
+          </a:stretch>
+        </p:blipFill>
+        <p:spPr>
+          <a:xfrm>
+            <a:off x="5227168" y="2286000"/>
+            <a:ext cx="1737360" cy="1737360"/>
+          </a:xfrm>
+          <a:prstGeom prst="rect">
+            <a:avLst/>
+          </a:prstGeom>
+        </p:spPr>
+      </p:pic>
+      <p:sp>
+        <p:nvSpPr>
+          <p:cNvPr id="8" name="Text 4"/>
+          <p:cNvSpPr/>
+          <p:nvPr/>
+        </p:nvSpPr>
+        <p:spPr>
+          <a:xfrm>
+            <a:off x="868680" y="4572000"/>
+            <a:ext cx="10454335" cy="822960"/>
+          </a:xfrm>
+          <a:prstGeom prst="rect">
+            <a:avLst/>
+          </a:prstGeom>
+          <a:noFill/>
+          <a:ln/>
+        </p:spPr>
+        <p:txBody>
+          <a:bodyPr wrap="square" rtlCol="0" anchor="ctr"/>
+          <a:lstStyle/>
+          <a:p>
+            <a:pPr algn="ctr" indent="0" marL="0">
+              <a:buNone/>
+            </a:pPr>
+            <a:r>
+              <a:rPr lang="en-US" sz="4400" dirty="0">
+                <a:solidFill>
+                  <a:srgbClr val="E6EAF0"/>
+                </a:solidFill>
+                <a:latin typeface="Georgia" pitchFamily="34" charset="0"/>
+                <a:ea typeface="Georgia" pitchFamily="34" charset="-122"/>
+                <a:cs typeface="Georgia" pitchFamily="34" charset="-120"/>
+              </a:rPr>
+              <a:t>One rail. No intermediaries.</a:t>
+            </a:r>
+            <a:endParaRPr lang="en-US" sz="4400" dirty="0"/>
+          </a:p>
+        </p:txBody>
+      </p:sp>
+      <p:sp>
+        <p:nvSpPr>
+          <p:cNvPr id="9" name="Text 5"/>
+          <p:cNvSpPr/>
+          <p:nvPr/>
+        </p:nvSpPr>
+        <p:spPr>
+          <a:xfrm>
+            <a:off x="868680" y="5349240"/>
+            <a:ext cx="10454335" cy="457200"/>
+          </a:xfrm>
+          <a:prstGeom prst="rect">
+            <a:avLst/>
+          </a:prstGeom>
+          <a:noFill/>
+          <a:ln/>
+        </p:spPr>
+        <p:txBody>
+          <a:bodyPr wrap="square" rtlCol="0" anchor="ctr"/>
+          <a:lstStyle/>
+          <a:p>
+            <a:pPr algn="ctr" indent="0" marL="0">
+              <a:buNone/>
+            </a:pPr>
+            <a:r>
+              <a:rPr lang="en-US" sz="1700" dirty="0">
+                <a:solidFill>
+                  <a:srgbClr val="96A3B5"/>
+                </a:solidFill>
+                <a:latin typeface="Georgia" pitchFamily="34" charset="0"/>
+                <a:ea typeface="Georgia" pitchFamily="34" charset="-122"/>
+                <a:cs typeface="Georgia" pitchFamily="34" charset="-120"/>
+              </a:rPr>
+              <a:t>A settlement contract holds the funds. It locks on one side and releases on the other.</a:t>
+            </a:r>
+            <a:endParaRPr lang="en-US" sz="1700" dirty="0"/>
+          </a:p>
+        </p:txBody>
+      </p:sp>
+      <p:sp>
+        <p:nvSpPr>
+          <p:cNvPr id="10" name="Shape 6"/>
+          <p:cNvSpPr/>
+          <p:nvPr/>
+        </p:nvSpPr>
+        <p:spPr>
+          <a:xfrm>
+            <a:off x="868680" y="6053328"/>
+            <a:ext cx="10454335" cy="10973"/>
+          </a:xfrm>
+          <a:prstGeom prst="rect">
+            <a:avLst/>
+          </a:prstGeom>
+          <a:solidFill>
+            <a:srgbClr val="243040"/>
+          </a:solidFill>
+          <a:ln w="12700">
+            <a:solidFill>
+              <a:srgbClr val="333333"/>
+            </a:solidFill>
+            <a:prstDash val="solid"/>
+          </a:ln>
+        </p:spPr>
+      </p:sp>
+      <p:sp>
+        <p:nvSpPr>
+          <p:cNvPr id="11" name="Text 7"/>
           <p:cNvSpPr/>
           <p:nvPr/>
         </p:nvSpPr>
@@ -3128,7 +3220,7 @@
       </p:sp>
       <p:sp>
         <p:nvSpPr>
-          <p:cNvPr id="9" name="Text 6"/>
+          <p:cNvPr id="12" name="Text 8"/>
           <p:cNvSpPr/>
           <p:nvPr/>
         </p:nvSpPr>
@@ -4137,42 +4229,137 @@
       </p:sp>
       <p:sp>
         <p:nvSpPr>
-          <p:cNvPr id="4" name="Shape 1"/>
-          <p:cNvSpPr/>
-          <p:nvPr/>
-        </p:nvSpPr>
-        <p:spPr>
-          <a:xfrm>
-            <a:off x="868680" y="1508760"/>
-            <a:ext cx="868680" cy="868680"/>
-          </a:xfrm>
-          <a:prstGeom prst="ellipse">
-            <a:avLst/>
-          </a:prstGeom>
-          <a:ln w="82525">
-            <a:solidFill>
-              <a:srgbClr val="4B86FF"/>
-            </a:solidFill>
-            <a:prstDash val="solid"/>
-          </a:ln>
-        </p:spPr>
-      </p:sp>
-      <p:sp>
-        <p:nvSpPr>
-          <p:cNvPr id="5" name="Shape 2"/>
-          <p:cNvSpPr/>
-          <p:nvPr/>
-        </p:nvSpPr>
-        <p:spPr>
-          <a:xfrm>
-            <a:off x="747065" y="1868828"/>
-            <a:ext cx="1111910" cy="148544"/>
-          </a:xfrm>
-          <a:prstGeom prst="rect">
-            <a:avLst/>
-          </a:prstGeom>
-          <a:solidFill>
-            <a:srgbClr val="0A0E14"/>
+          <p:cNvPr id="4" name="Text 1"/>
+          <p:cNvSpPr/>
+          <p:nvPr/>
+        </p:nvSpPr>
+        <p:spPr>
+          <a:xfrm>
+            <a:off x="868680" y="1325880"/>
+            <a:ext cx="10454335" cy="274320"/>
+          </a:xfrm>
+          <a:prstGeom prst="rect">
+            <a:avLst/>
+          </a:prstGeom>
+          <a:noFill/>
+          <a:ln/>
+        </p:spPr>
+        <p:txBody>
+          <a:bodyPr wrap="square" rtlCol="0" anchor="ctr"/>
+          <a:lstStyle/>
+          <a:p>
+            <a:pPr indent="0" marL="0">
+              <a:buNone/>
+            </a:pPr>
+            <a:r>
+              <a:rPr lang="en-US" sz="1100" spc="200" kern="0" dirty="0">
+                <a:solidFill>
+                  <a:srgbClr val="71839D"/>
+                </a:solidFill>
+                <a:latin typeface="Consolas" pitchFamily="34" charset="0"/>
+                <a:ea typeface="Consolas" pitchFamily="34" charset="-122"/>
+                <a:cs typeface="Consolas" pitchFamily="34" charset="-120"/>
+              </a:rPr>
+              <a:t>BUILT BY FIVE PEOPLE IN BOLIVIA</a:t>
+            </a:r>
+            <a:endParaRPr lang="en-US" sz="1100" dirty="0"/>
+          </a:p>
+        </p:txBody>
+      </p:sp>
+      <p:sp>
+        <p:nvSpPr>
+          <p:cNvPr id="5" name="Text 2"/>
+          <p:cNvSpPr/>
+          <p:nvPr/>
+        </p:nvSpPr>
+        <p:spPr>
+          <a:xfrm>
+            <a:off x="868680" y="2057400"/>
+            <a:ext cx="4206240" cy="457200"/>
+          </a:xfrm>
+          <a:prstGeom prst="rect">
+            <a:avLst/>
+          </a:prstGeom>
+          <a:noFill/>
+          <a:ln/>
+        </p:spPr>
+        <p:txBody>
+          <a:bodyPr wrap="square" rtlCol="0" anchor="ctr"/>
+          <a:lstStyle/>
+          <a:p>
+            <a:pPr indent="0" marL="0">
+              <a:buNone/>
+            </a:pPr>
+            <a:r>
+              <a:rPr lang="en-US" sz="2200" dirty="0">
+                <a:solidFill>
+                  <a:srgbClr val="E6EAF0"/>
+                </a:solidFill>
+                <a:latin typeface="Georgia" pitchFamily="34" charset="0"/>
+                <a:ea typeface="Georgia" pitchFamily="34" charset="-122"/>
+                <a:cs typeface="Georgia" pitchFamily="34" charset="-120"/>
+              </a:rPr>
+              <a:t>Julio Severiche</a:t>
+            </a:r>
+            <a:endParaRPr lang="en-US" sz="2200" dirty="0"/>
+          </a:p>
+        </p:txBody>
+      </p:sp>
+      <p:sp>
+        <p:nvSpPr>
+          <p:cNvPr id="6" name="Text 3"/>
+          <p:cNvSpPr/>
+          <p:nvPr/>
+        </p:nvSpPr>
+        <p:spPr>
+          <a:xfrm>
+            <a:off x="5257800" y="2057400"/>
+            <a:ext cx="6065215" cy="457200"/>
+          </a:xfrm>
+          <a:prstGeom prst="rect">
+            <a:avLst/>
+          </a:prstGeom>
+          <a:noFill/>
+          <a:ln/>
+        </p:spPr>
+        <p:txBody>
+          <a:bodyPr wrap="square" rtlCol="0" anchor="ctr"/>
+          <a:lstStyle/>
+          <a:p>
+            <a:pPr indent="0" marL="0">
+              <a:buNone/>
+            </a:pPr>
+            <a:r>
+              <a:rPr lang="en-US" sz="1250" dirty="0">
+                <a:solidFill>
+                  <a:srgbClr val="96A3B5"/>
+                </a:solidFill>
+                <a:latin typeface="Consolas" pitchFamily="34" charset="0"/>
+                <a:ea typeface="Consolas" pitchFamily="34" charset="-122"/>
+                <a:cs typeface="Consolas" pitchFamily="34" charset="-120"/>
+              </a:rPr>
+              <a:t>Architecture · Web · Identity</a:t>
+            </a:r>
+            <a:endParaRPr lang="en-US" sz="1250" dirty="0"/>
+          </a:p>
+        </p:txBody>
+      </p:sp>
+      <p:sp>
+        <p:nvSpPr>
+          <p:cNvPr id="7" name="Shape 4"/>
+          <p:cNvSpPr/>
+          <p:nvPr/>
+        </p:nvSpPr>
+        <p:spPr>
+          <a:xfrm>
+            <a:off x="868680" y="2633472"/>
+            <a:ext cx="10454335" cy="7315"/>
+          </a:xfrm>
+          <a:prstGeom prst="rect">
+            <a:avLst/>
+          </a:prstGeom>
+          <a:solidFill>
+            <a:srgbClr val="243040"/>
           </a:solidFill>
           <a:ln w="12700">
             <a:solidFill>
@@ -4184,20 +4371,98 @@
       </p:sp>
       <p:sp>
         <p:nvSpPr>
-          <p:cNvPr id="6" name="Shape 3"/>
-          <p:cNvSpPr/>
-          <p:nvPr/>
-        </p:nvSpPr>
-        <p:spPr>
-          <a:xfrm>
-            <a:off x="747065" y="1901838"/>
-            <a:ext cx="1111910" cy="82525"/>
-          </a:xfrm>
-          <a:prstGeom prst="rect">
-            <a:avLst/>
-          </a:prstGeom>
-          <a:solidFill>
-            <a:srgbClr val="4B86FF"/>
+          <p:cNvPr id="8" name="Text 5"/>
+          <p:cNvSpPr/>
+          <p:nvPr/>
+        </p:nvSpPr>
+        <p:spPr>
+          <a:xfrm>
+            <a:off x="868680" y="2807208"/>
+            <a:ext cx="4206240" cy="457200"/>
+          </a:xfrm>
+          <a:prstGeom prst="rect">
+            <a:avLst/>
+          </a:prstGeom>
+          <a:noFill/>
+          <a:ln/>
+        </p:spPr>
+        <p:txBody>
+          <a:bodyPr wrap="square" rtlCol="0" anchor="ctr"/>
+          <a:lstStyle/>
+          <a:p>
+            <a:pPr indent="0" marL="0">
+              <a:buNone/>
+            </a:pPr>
+            <a:r>
+              <a:rPr lang="en-US" sz="2200" dirty="0">
+                <a:solidFill>
+                  <a:srgbClr val="E6EAF0"/>
+                </a:solidFill>
+                <a:latin typeface="Georgia" pitchFamily="34" charset="0"/>
+                <a:ea typeface="Georgia" pitchFamily="34" charset="-122"/>
+                <a:cs typeface="Georgia" pitchFamily="34" charset="-120"/>
+              </a:rPr>
+              <a:t>Moises Cisneros</a:t>
+            </a:r>
+            <a:endParaRPr lang="en-US" sz="2200" dirty="0"/>
+          </a:p>
+        </p:txBody>
+      </p:sp>
+      <p:sp>
+        <p:nvSpPr>
+          <p:cNvPr id="9" name="Text 6"/>
+          <p:cNvSpPr/>
+          <p:nvPr/>
+        </p:nvSpPr>
+        <p:spPr>
+          <a:xfrm>
+            <a:off x="5257800" y="2807208"/>
+            <a:ext cx="6065215" cy="457200"/>
+          </a:xfrm>
+          <a:prstGeom prst="rect">
+            <a:avLst/>
+          </a:prstGeom>
+          <a:noFill/>
+          <a:ln/>
+        </p:spPr>
+        <p:txBody>
+          <a:bodyPr wrap="square" rtlCol="0" anchor="ctr"/>
+          <a:lstStyle/>
+          <a:p>
+            <a:pPr indent="0" marL="0">
+              <a:buNone/>
+            </a:pPr>
+            <a:r>
+              <a:rPr lang="en-US" sz="1250" dirty="0">
+                <a:solidFill>
+                  <a:srgbClr val="96A3B5"/>
+                </a:solidFill>
+                <a:latin typeface="Consolas" pitchFamily="34" charset="0"/>
+                <a:ea typeface="Consolas" pitchFamily="34" charset="-122"/>
+                <a:cs typeface="Consolas" pitchFamily="34" charset="-120"/>
+              </a:rPr>
+              <a:t>CCTP bridge · SDK · Gateway</a:t>
+            </a:r>
+            <a:endParaRPr lang="en-US" sz="1250" dirty="0"/>
+          </a:p>
+        </p:txBody>
+      </p:sp>
+      <p:sp>
+        <p:nvSpPr>
+          <p:cNvPr id="10" name="Shape 7"/>
+          <p:cNvSpPr/>
+          <p:nvPr/>
+        </p:nvSpPr>
+        <p:spPr>
+          <a:xfrm>
+            <a:off x="868680" y="3383280"/>
+            <a:ext cx="10454335" cy="7315"/>
+          </a:xfrm>
+          <a:prstGeom prst="rect">
+            <a:avLst/>
+          </a:prstGeom>
+          <a:solidFill>
+            <a:srgbClr val="243040"/>
           </a:solidFill>
           <a:ln w="12700">
             <a:solidFill>
@@ -4209,14 +4474,14 @@
       </p:sp>
       <p:sp>
         <p:nvSpPr>
-          <p:cNvPr id="7" name="Text 4"/>
-          <p:cNvSpPr/>
-          <p:nvPr/>
-        </p:nvSpPr>
-        <p:spPr>
-          <a:xfrm>
-            <a:off x="2148840" y="1417320"/>
-            <a:ext cx="4572000" cy="1371600"/>
+          <p:cNvPr id="11" name="Text 8"/>
+          <p:cNvSpPr/>
+          <p:nvPr/>
+        </p:nvSpPr>
+        <p:spPr>
+          <a:xfrm>
+            <a:off x="868680" y="3557016"/>
+            <a:ext cx="4206240" cy="457200"/>
           </a:xfrm>
           <a:prstGeom prst="rect">
             <a:avLst/>
@@ -4232,7 +4497,7 @@
               <a:buNone/>
             </a:pPr>
             <a:r>
-              <a:rPr lang="en-US" sz="6600" b="1" spc="200" kern="0" dirty="0">
+              <a:rPr lang="en-US" sz="2200" dirty="0">
                 <a:solidFill>
                   <a:srgbClr val="E6EAF0"/>
                 </a:solidFill>
@@ -4240,22 +4505,22 @@
                 <a:ea typeface="Georgia" pitchFamily="34" charset="-122"/>
                 <a:cs typeface="Georgia" pitchFamily="34" charset="-120"/>
               </a:rPr>
-              <a:t>ZIP·0</a:t>
-            </a:r>
-            <a:endParaRPr lang="en-US" sz="6600" dirty="0"/>
-          </a:p>
-        </p:txBody>
-      </p:sp>
-      <p:sp>
-        <p:nvSpPr>
-          <p:cNvPr id="8" name="Text 5"/>
-          <p:cNvSpPr/>
-          <p:nvPr/>
-        </p:nvSpPr>
-        <p:spPr>
-          <a:xfrm>
-            <a:off x="868680" y="3063240"/>
-            <a:ext cx="10058400" cy="1828800"/>
+              <a:t>Fernando Vasquez</a:t>
+            </a:r>
+            <a:endParaRPr lang="en-US" sz="2200" dirty="0"/>
+          </a:p>
+        </p:txBody>
+      </p:sp>
+      <p:sp>
+        <p:nvSpPr>
+          <p:cNvPr id="12" name="Text 9"/>
+          <p:cNvSpPr/>
+          <p:nvPr/>
+        </p:nvSpPr>
+        <p:spPr>
+          <a:xfrm>
+            <a:off x="5257800" y="3557016"/>
+            <a:ext cx="6065215" cy="457200"/>
           </a:xfrm>
           <a:prstGeom prst="rect">
             <a:avLst/>
@@ -4268,95 +4533,33 @@
           <a:lstStyle/>
           <a:p>
             <a:pPr indent="0" marL="0">
-              <a:lnSpc>
-                <a:spcPts val="5400"/>
-              </a:lnSpc>
-              <a:buNone/>
-            </a:pPr>
-            <a:r>
-              <a:rPr lang="en-US" sz="4600" dirty="0">
-                <a:solidFill>
-                  <a:srgbClr val="E6EAF0"/>
-                </a:solidFill>
-                <a:latin typeface="Georgia" pitchFamily="34" charset="0"/>
-                <a:ea typeface="Georgia" pitchFamily="34" charset="-122"/>
-                <a:cs typeface="Georgia" pitchFamily="34" charset="-120"/>
-              </a:rPr>
-              <a:t>The amount you send</a:t>
-            </a:r>
-            <a:endParaRPr lang="en-US" sz="4600" dirty="0"/>
-          </a:p>
-          <a:p>
-            <a:pPr indent="0" marL="0">
-              <a:lnSpc>
-                <a:spcPts val="5400"/>
-              </a:lnSpc>
-              <a:buNone/>
-            </a:pPr>
-            <a:r>
-              <a:rPr lang="en-US" sz="4600" dirty="0">
-                <a:solidFill>
-                  <a:srgbClr val="E6EAF0"/>
-                </a:solidFill>
-                <a:latin typeface="Georgia" pitchFamily="34" charset="0"/>
-                <a:ea typeface="Georgia" pitchFamily="34" charset="-122"/>
-                <a:cs typeface="Georgia" pitchFamily="34" charset="-120"/>
-              </a:rPr>
-              <a:t>is the amount that arrives.</a:t>
-            </a:r>
-            <a:endParaRPr lang="en-US" sz="4600" dirty="0"/>
-          </a:p>
-        </p:txBody>
-      </p:sp>
-      <p:sp>
-        <p:nvSpPr>
-          <p:cNvPr id="9" name="Text 6"/>
-          <p:cNvSpPr/>
-          <p:nvPr/>
-        </p:nvSpPr>
-        <p:spPr>
-          <a:xfrm>
-            <a:off x="868680" y="5029200"/>
-            <a:ext cx="8229600" cy="457200"/>
-          </a:xfrm>
-          <a:prstGeom prst="rect">
-            <a:avLst/>
-          </a:prstGeom>
-          <a:noFill/>
-          <a:ln/>
-        </p:spPr>
-        <p:txBody>
-          <a:bodyPr wrap="square" rtlCol="0" anchor="ctr"/>
-          <a:lstStyle/>
-          <a:p>
-            <a:pPr indent="0" marL="0">
-              <a:buNone/>
-            </a:pPr>
-            <a:r>
-              <a:rPr lang="en-US" sz="1800" dirty="0">
+              <a:buNone/>
+            </a:pPr>
+            <a:r>
+              <a:rPr lang="en-US" sz="1250" dirty="0">
                 <a:solidFill>
                   <a:srgbClr val="96A3B5"/>
                 </a:solidFill>
-                <a:latin typeface="Georgia" pitchFamily="34" charset="0"/>
-                <a:ea typeface="Georgia" pitchFamily="34" charset="-122"/>
-                <a:cs typeface="Georgia" pitchFamily="34" charset="-120"/>
-              </a:rPr>
-              <a:t>Next: an audit, and one pilot corridor — Bolivia to Brazil.</a:t>
-            </a:r>
-            <a:endParaRPr lang="en-US" sz="1800" dirty="0"/>
-          </a:p>
-        </p:txBody>
-      </p:sp>
-      <p:sp>
-        <p:nvSpPr>
-          <p:cNvPr id="10" name="Shape 7"/>
-          <p:cNvSpPr/>
-          <p:nvPr/>
-        </p:nvSpPr>
-        <p:spPr>
-          <a:xfrm>
-            <a:off x="868680" y="6053328"/>
-            <a:ext cx="10454335" cy="10973"/>
+                <a:latin typeface="Consolas" pitchFamily="34" charset="0"/>
+                <a:ea typeface="Consolas" pitchFamily="34" charset="-122"/>
+                <a:cs typeface="Consolas" pitchFamily="34" charset="-120"/>
+              </a:rPr>
+              <a:t>Settlement rail · Gasless deposits</a:t>
+            </a:r>
+            <a:endParaRPr lang="en-US" sz="1250" dirty="0"/>
+          </a:p>
+        </p:txBody>
+      </p:sp>
+      <p:sp>
+        <p:nvSpPr>
+          <p:cNvPr id="13" name="Shape 10"/>
+          <p:cNvSpPr/>
+          <p:nvPr/>
+        </p:nvSpPr>
+        <p:spPr>
+          <a:xfrm>
+            <a:off x="868680" y="4133088"/>
+            <a:ext cx="10454335" cy="7315"/>
           </a:xfrm>
           <a:prstGeom prst="rect">
             <a:avLst/>
@@ -4374,14 +4577,14 @@
       </p:sp>
       <p:sp>
         <p:nvSpPr>
-          <p:cNvPr id="11" name="Text 8"/>
-          <p:cNvSpPr/>
-          <p:nvPr/>
-        </p:nvSpPr>
-        <p:spPr>
-          <a:xfrm>
-            <a:off x="868680" y="6172200"/>
-            <a:ext cx="7315200" cy="274320"/>
+          <p:cNvPr id="14" name="Text 11"/>
+          <p:cNvSpPr/>
+          <p:nvPr/>
+        </p:nvSpPr>
+        <p:spPr>
+          <a:xfrm>
+            <a:off x="868680" y="4306824"/>
+            <a:ext cx="4206240" cy="457200"/>
           </a:xfrm>
           <a:prstGeom prst="rect">
             <a:avLst/>
@@ -4397,54 +4600,584 @@
               <a:buNone/>
             </a:pPr>
             <a:r>
-              <a:rPr lang="en-US" sz="1000" spc="100" kern="0" dirty="0">
-                <a:solidFill>
-                  <a:srgbClr val="71839D"/>
+              <a:rPr lang="en-US" sz="2200" dirty="0">
+                <a:solidFill>
+                  <a:srgbClr val="E6EAF0"/>
+                </a:solidFill>
+                <a:latin typeface="Georgia" pitchFamily="34" charset="0"/>
+                <a:ea typeface="Georgia" pitchFamily="34" charset="-122"/>
+                <a:cs typeface="Georgia" pitchFamily="34" charset="-120"/>
+              </a:rPr>
+              <a:t>Luishiño Pericena</a:t>
+            </a:r>
+            <a:endParaRPr lang="en-US" sz="2200" dirty="0"/>
+          </a:p>
+        </p:txBody>
+      </p:sp>
+      <p:sp>
+        <p:nvSpPr>
+          <p:cNvPr id="15" name="Text 12"/>
+          <p:cNvSpPr/>
+          <p:nvPr/>
+        </p:nvSpPr>
+        <p:spPr>
+          <a:xfrm>
+            <a:off x="5257800" y="4306824"/>
+            <a:ext cx="6065215" cy="457200"/>
+          </a:xfrm>
+          <a:prstGeom prst="rect">
+            <a:avLst/>
+          </a:prstGeom>
+          <a:noFill/>
+          <a:ln/>
+        </p:spPr>
+        <p:txBody>
+          <a:bodyPr wrap="square" rtlCol="0" anchor="ctr"/>
+          <a:lstStyle/>
+          <a:p>
+            <a:pPr indent="0" marL="0">
+              <a:buNone/>
+            </a:pPr>
+            <a:r>
+              <a:rPr lang="en-US" sz="1250" dirty="0">
+                <a:solidFill>
+                  <a:srgbClr val="96A3B5"/>
                 </a:solidFill>
                 <a:latin typeface="Consolas" pitchFamily="34" charset="0"/>
                 <a:ea typeface="Consolas" pitchFamily="34" charset="-122"/>
                 <a:cs typeface="Consolas" pitchFamily="34" charset="-120"/>
               </a:rPr>
-              <a:t>ZIP·0</a:t>
-            </a:r>
-            <a:endParaRPr lang="en-US" sz="1000" dirty="0"/>
-          </a:p>
-        </p:txBody>
-      </p:sp>
-      <p:sp>
-        <p:nvSpPr>
-          <p:cNvPr id="12" name="Text 9"/>
-          <p:cNvSpPr/>
-          <p:nvPr/>
-        </p:nvSpPr>
-        <p:spPr>
-          <a:xfrm>
-            <a:off x="10408615" y="6172200"/>
-            <a:ext cx="914400" cy="274320"/>
-          </a:xfrm>
-          <a:prstGeom prst="rect">
-            <a:avLst/>
-          </a:prstGeom>
-          <a:noFill/>
-          <a:ln/>
-        </p:spPr>
-        <p:txBody>
-          <a:bodyPr wrap="square" rtlCol="0" anchor="ctr"/>
-          <a:lstStyle/>
-          <a:p>
-            <a:pPr algn="r" indent="0" marL="0">
-              <a:buNone/>
-            </a:pPr>
-            <a:r>
-              <a:rPr lang="en-US" sz="1000" dirty="0">
-                <a:solidFill>
-                  <a:srgbClr val="71839D"/>
+              <a:t>Live payment evidence · Relayer state</a:t>
+            </a:r>
+            <a:endParaRPr lang="en-US" sz="1250" dirty="0"/>
+          </a:p>
+        </p:txBody>
+      </p:sp>
+      <p:sp>
+        <p:nvSpPr>
+          <p:cNvPr id="16" name="Shape 13"/>
+          <p:cNvSpPr/>
+          <p:nvPr/>
+        </p:nvSpPr>
+        <p:spPr>
+          <a:xfrm>
+            <a:off x="868680" y="4882896"/>
+            <a:ext cx="10454335" cy="7315"/>
+          </a:xfrm>
+          <a:prstGeom prst="rect">
+            <a:avLst/>
+          </a:prstGeom>
+          <a:solidFill>
+            <a:srgbClr val="243040"/>
+          </a:solidFill>
+          <a:ln w="12700">
+            <a:solidFill>
+              <a:srgbClr val="333333"/>
+            </a:solidFill>
+            <a:prstDash val="solid"/>
+          </a:ln>
+        </p:spPr>
+      </p:sp>
+      <p:sp>
+        <p:nvSpPr>
+          <p:cNvPr id="17" name="Text 14"/>
+          <p:cNvSpPr/>
+          <p:nvPr/>
+        </p:nvSpPr>
+        <p:spPr>
+          <a:xfrm>
+            <a:off x="868680" y="5056632"/>
+            <a:ext cx="4206240" cy="457200"/>
+          </a:xfrm>
+          <a:prstGeom prst="rect">
+            <a:avLst/>
+          </a:prstGeom>
+          <a:noFill/>
+          <a:ln/>
+        </p:spPr>
+        <p:txBody>
+          <a:bodyPr wrap="square" rtlCol="0" anchor="ctr"/>
+          <a:lstStyle/>
+          <a:p>
+            <a:pPr indent="0" marL="0">
+              <a:buNone/>
+            </a:pPr>
+            <a:r>
+              <a:rPr lang="en-US" sz="2200" dirty="0">
+                <a:solidFill>
+                  <a:srgbClr val="E6EAF0"/>
+                </a:solidFill>
+                <a:latin typeface="Georgia" pitchFamily="34" charset="0"/>
+                <a:ea typeface="Georgia" pitchFamily="34" charset="-122"/>
+                <a:cs typeface="Georgia" pitchFamily="34" charset="-120"/>
+              </a:rPr>
+              <a:t>William Y.M</a:t>
+            </a:r>
+            <a:endParaRPr lang="en-US" sz="2200" dirty="0"/>
+          </a:p>
+        </p:txBody>
+      </p:sp>
+      <p:sp>
+        <p:nvSpPr>
+          <p:cNvPr id="18" name="Text 15"/>
+          <p:cNvSpPr/>
+          <p:nvPr/>
+        </p:nvSpPr>
+        <p:spPr>
+          <a:xfrm>
+            <a:off x="5257800" y="5056632"/>
+            <a:ext cx="6065215" cy="457200"/>
+          </a:xfrm>
+          <a:prstGeom prst="rect">
+            <a:avLst/>
+          </a:prstGeom>
+          <a:noFill/>
+          <a:ln/>
+        </p:spPr>
+        <p:txBody>
+          <a:bodyPr wrap="square" rtlCol="0" anchor="ctr"/>
+          <a:lstStyle/>
+          <a:p>
+            <a:pPr indent="0" marL="0">
+              <a:buNone/>
+            </a:pPr>
+            <a:r>
+              <a:rPr lang="en-US" sz="1250" dirty="0">
+                <a:solidFill>
+                  <a:srgbClr val="96A3B5"/>
                 </a:solidFill>
                 <a:latin typeface="Consolas" pitchFamily="34" charset="0"/>
                 <a:ea typeface="Consolas" pitchFamily="34" charset="-122"/>
                 <a:cs typeface="Consolas" pitchFamily="34" charset="-120"/>
               </a:rPr>
+              <a:t>Refund timeout · Relayer acknowledgement</a:t>
+            </a:r>
+            <a:endParaRPr lang="en-US" sz="1250" dirty="0"/>
+          </a:p>
+        </p:txBody>
+      </p:sp>
+      <p:sp>
+        <p:nvSpPr>
+          <p:cNvPr id="19" name="Shape 16"/>
+          <p:cNvSpPr/>
+          <p:nvPr/>
+        </p:nvSpPr>
+        <p:spPr>
+          <a:xfrm>
+            <a:off x="868680" y="6053328"/>
+            <a:ext cx="10454335" cy="10973"/>
+          </a:xfrm>
+          <a:prstGeom prst="rect">
+            <a:avLst/>
+          </a:prstGeom>
+          <a:solidFill>
+            <a:srgbClr val="243040"/>
+          </a:solidFill>
+          <a:ln w="12700">
+            <a:solidFill>
+              <a:srgbClr val="333333"/>
+            </a:solidFill>
+            <a:prstDash val="solid"/>
+          </a:ln>
+        </p:spPr>
+      </p:sp>
+      <p:sp>
+        <p:nvSpPr>
+          <p:cNvPr id="20" name="Text 17"/>
+          <p:cNvSpPr/>
+          <p:nvPr/>
+        </p:nvSpPr>
+        <p:spPr>
+          <a:xfrm>
+            <a:off x="868680" y="6172200"/>
+            <a:ext cx="7315200" cy="274320"/>
+          </a:xfrm>
+          <a:prstGeom prst="rect">
+            <a:avLst/>
+          </a:prstGeom>
+          <a:noFill/>
+          <a:ln/>
+        </p:spPr>
+        <p:txBody>
+          <a:bodyPr wrap="square" rtlCol="0" anchor="ctr"/>
+          <a:lstStyle/>
+          <a:p>
+            <a:pPr indent="0" marL="0">
+              <a:buNone/>
+            </a:pPr>
+            <a:r>
+              <a:rPr lang="en-US" sz="1000" spc="100" kern="0" dirty="0">
+                <a:solidFill>
+                  <a:srgbClr val="71839D"/>
+                </a:solidFill>
+                <a:latin typeface="Consolas" pitchFamily="34" charset="0"/>
+                <a:ea typeface="Consolas" pitchFamily="34" charset="-122"/>
+                <a:cs typeface="Consolas" pitchFamily="34" charset="-120"/>
+              </a:rPr>
+              <a:t>Zer0-Knowledge-Hack</a:t>
+            </a:r>
+            <a:endParaRPr lang="en-US" sz="1000" dirty="0"/>
+          </a:p>
+        </p:txBody>
+      </p:sp>
+      <p:sp>
+        <p:nvSpPr>
+          <p:cNvPr id="21" name="Text 18"/>
+          <p:cNvSpPr/>
+          <p:nvPr/>
+        </p:nvSpPr>
+        <p:spPr>
+          <a:xfrm>
+            <a:off x="10408615" y="6172200"/>
+            <a:ext cx="914400" cy="274320"/>
+          </a:xfrm>
+          <a:prstGeom prst="rect">
+            <a:avLst/>
+          </a:prstGeom>
+          <a:noFill/>
+          <a:ln/>
+        </p:spPr>
+        <p:txBody>
+          <a:bodyPr wrap="square" rtlCol="0" anchor="ctr"/>
+          <a:lstStyle/>
+          <a:p>
+            <a:pPr algn="r" indent="0" marL="0">
+              <a:buNone/>
+            </a:pPr>
+            <a:r>
+              <a:rPr lang="en-US" sz="1000" dirty="0">
+                <a:solidFill>
+                  <a:srgbClr val="71839D"/>
+                </a:solidFill>
+                <a:latin typeface="Consolas" pitchFamily="34" charset="0"/>
+                <a:ea typeface="Consolas" pitchFamily="34" charset="-122"/>
+                <a:cs typeface="Consolas" pitchFamily="34" charset="-120"/>
+              </a:rPr>
               <a:t>07</a:t>
+            </a:r>
+            <a:endParaRPr lang="en-US" sz="1000" dirty="0"/>
+          </a:p>
+        </p:txBody>
+      </p:sp>
+    </p:spTree>
+  </p:cSld>
+  <p:clrMapOvr>
+    <a:masterClrMapping/>
+  </p:clrMapOvr>
+</p:sld>
+</file>
+
+<file path=ppt/slides/slide8.xml><?xml version="1.0" encoding="utf-8"?>
+<p:sld xmlns:a="http://schemas.openxmlformats.org/drawingml/2006/main" xmlns:r="http://schemas.openxmlformats.org/officeDocument/2006/relationships" xmlns:p="http://schemas.openxmlformats.org/presentationml/2006/main">
+  <p:cSld name="Slide 8">
+    <p:bg>
+      <p:bgPr>
+        <a:solidFill>
+          <a:srgbClr val="0A0E14"/>
+        </a:solidFill>
+      </p:bgPr>
+    </p:bg>
+    <p:spTree>
+      <p:nvGrpSpPr>
+        <p:cNvPr id="1" name=""/>
+        <p:cNvGrpSpPr/>
+        <p:nvPr/>
+      </p:nvGrpSpPr>
+      <p:grpSpPr>
+        <a:xfrm>
+          <a:off x="0" y="0"/>
+          <a:ext cx="0" cy="0"/>
+          <a:chOff x="0" y="0"/>
+          <a:chExt cx="0" cy="0"/>
+        </a:xfrm>
+      </p:grpSpPr>
+      <p:sp>
+        <p:nvSpPr>
+          <p:cNvPr id="2" name="Shape 0"/>
+          <p:cNvSpPr/>
+          <p:nvPr/>
+        </p:nvSpPr>
+        <p:spPr>
+          <a:xfrm>
+            <a:off x="868680" y="731520"/>
+            <a:ext cx="10454335" cy="10973"/>
+          </a:xfrm>
+          <a:prstGeom prst="rect">
+            <a:avLst/>
+          </a:prstGeom>
+          <a:solidFill>
+            <a:srgbClr val="243040"/>
+          </a:solidFill>
+          <a:ln w="12700">
+            <a:solidFill>
+              <a:srgbClr val="333333"/>
+            </a:solidFill>
+            <a:prstDash val="solid"/>
+          </a:ln>
+        </p:spPr>
+      </p:sp>
+      <p:pic>
+        <p:nvPicPr>
+          <p:cNvPr id="4" name="Image 0" descr="preencoded.png">    </p:cNvPr>
+          <p:cNvPicPr>
+            <a:picLocks noChangeAspect="1"/>
+          </p:cNvPicPr>
+          <p:nvPr/>
+        </p:nvPicPr>
+        <p:blipFill>
+          <a:blip r:embed="rId1"/>
+          <a:stretch>
+            <a:fillRect/>
+          </a:stretch>
+        </p:blipFill>
+        <p:spPr>
+          <a:xfrm>
+            <a:off x="868680" y="1463040"/>
+            <a:ext cx="914400" cy="914400"/>
+          </a:xfrm>
+          <a:prstGeom prst="rect">
+            <a:avLst/>
+          </a:prstGeom>
+        </p:spPr>
+      </p:pic>
+      <p:sp>
+        <p:nvSpPr>
+          <p:cNvPr id="5" name="Text 1"/>
+          <p:cNvSpPr/>
+          <p:nvPr/>
+        </p:nvSpPr>
+        <p:spPr>
+          <a:xfrm>
+            <a:off x="2103120" y="1316736"/>
+            <a:ext cx="5486400" cy="1188720"/>
+          </a:xfrm>
+          <a:prstGeom prst="rect">
+            <a:avLst/>
+          </a:prstGeom>
+          <a:noFill/>
+          <a:ln/>
+        </p:spPr>
+        <p:txBody>
+          <a:bodyPr wrap="square" rtlCol="0" anchor="ctr"/>
+          <a:lstStyle/>
+          <a:p>
+            <a:pPr indent="0" marL="0">
+              <a:buNone/>
+            </a:pPr>
+            <a:r>
+              <a:rPr lang="en-US" sz="4600" b="1" spc="200" kern="0" dirty="0">
+                <a:solidFill>
+                  <a:srgbClr val="E6EAF0"/>
+                </a:solidFill>
+                <a:latin typeface="Georgia" pitchFamily="34" charset="0"/>
+                <a:ea typeface="Georgia" pitchFamily="34" charset="-122"/>
+                <a:cs typeface="Georgia" pitchFamily="34" charset="-120"/>
+              </a:rPr>
+              <a:t>ZIP·0</a:t>
+            </a:r>
+            <a:endParaRPr lang="en-US" sz="4600" dirty="0"/>
+          </a:p>
+        </p:txBody>
+      </p:sp>
+      <p:sp>
+        <p:nvSpPr>
+          <p:cNvPr id="6" name="Text 2"/>
+          <p:cNvSpPr/>
+          <p:nvPr/>
+        </p:nvSpPr>
+        <p:spPr>
+          <a:xfrm>
+            <a:off x="868680" y="2926080"/>
+            <a:ext cx="10058400" cy="1828800"/>
+          </a:xfrm>
+          <a:prstGeom prst="rect">
+            <a:avLst/>
+          </a:prstGeom>
+          <a:noFill/>
+          <a:ln/>
+        </p:spPr>
+        <p:txBody>
+          <a:bodyPr wrap="square" rtlCol="0" anchor="ctr"/>
+          <a:lstStyle/>
+          <a:p>
+            <a:pPr indent="0" marL="0">
+              <a:lnSpc>
+                <a:spcPts val="5400"/>
+              </a:lnSpc>
+              <a:buNone/>
+            </a:pPr>
+            <a:r>
+              <a:rPr lang="en-US" sz="4600" dirty="0">
+                <a:solidFill>
+                  <a:srgbClr val="E6EAF0"/>
+                </a:solidFill>
+                <a:latin typeface="Georgia" pitchFamily="34" charset="0"/>
+                <a:ea typeface="Georgia" pitchFamily="34" charset="-122"/>
+                <a:cs typeface="Georgia" pitchFamily="34" charset="-120"/>
+              </a:rPr>
+              <a:t>The amount you send</a:t>
+            </a:r>
+            <a:endParaRPr lang="en-US" sz="4600" dirty="0"/>
+          </a:p>
+          <a:p>
+            <a:pPr indent="0" marL="0">
+              <a:lnSpc>
+                <a:spcPts val="5400"/>
+              </a:lnSpc>
+              <a:buNone/>
+            </a:pPr>
+            <a:r>
+              <a:rPr lang="en-US" sz="4600" dirty="0">
+                <a:solidFill>
+                  <a:srgbClr val="E6EAF0"/>
+                </a:solidFill>
+                <a:latin typeface="Georgia" pitchFamily="34" charset="0"/>
+                <a:ea typeface="Georgia" pitchFamily="34" charset="-122"/>
+                <a:cs typeface="Georgia" pitchFamily="34" charset="-120"/>
+              </a:rPr>
+              <a:t>is the amount that arrives.</a:t>
+            </a:r>
+            <a:endParaRPr lang="en-US" sz="4600" dirty="0"/>
+          </a:p>
+        </p:txBody>
+      </p:sp>
+      <p:sp>
+        <p:nvSpPr>
+          <p:cNvPr id="7" name="Text 3"/>
+          <p:cNvSpPr/>
+          <p:nvPr/>
+        </p:nvSpPr>
+        <p:spPr>
+          <a:xfrm>
+            <a:off x="868680" y="4937760"/>
+            <a:ext cx="8229600" cy="457200"/>
+          </a:xfrm>
+          <a:prstGeom prst="rect">
+            <a:avLst/>
+          </a:prstGeom>
+          <a:noFill/>
+          <a:ln/>
+        </p:spPr>
+        <p:txBody>
+          <a:bodyPr wrap="square" rtlCol="0" anchor="ctr"/>
+          <a:lstStyle/>
+          <a:p>
+            <a:pPr indent="0" marL="0">
+              <a:buNone/>
+            </a:pPr>
+            <a:r>
+              <a:rPr lang="en-US" sz="1800" dirty="0">
+                <a:solidFill>
+                  <a:srgbClr val="96A3B5"/>
+                </a:solidFill>
+                <a:latin typeface="Georgia" pitchFamily="34" charset="0"/>
+                <a:ea typeface="Georgia" pitchFamily="34" charset="-122"/>
+                <a:cs typeface="Georgia" pitchFamily="34" charset="-120"/>
+              </a:rPr>
+              <a:t>Next: an audit, and one pilot corridor — Bolivia to Brazil.</a:t>
+            </a:r>
+            <a:endParaRPr lang="en-US" sz="1800" dirty="0"/>
+          </a:p>
+        </p:txBody>
+      </p:sp>
+      <p:sp>
+        <p:nvSpPr>
+          <p:cNvPr id="8" name="Shape 4"/>
+          <p:cNvSpPr/>
+          <p:nvPr/>
+        </p:nvSpPr>
+        <p:spPr>
+          <a:xfrm>
+            <a:off x="868680" y="6053328"/>
+            <a:ext cx="10454335" cy="10973"/>
+          </a:xfrm>
+          <a:prstGeom prst="rect">
+            <a:avLst/>
+          </a:prstGeom>
+          <a:solidFill>
+            <a:srgbClr val="243040"/>
+          </a:solidFill>
+          <a:ln w="12700">
+            <a:solidFill>
+              <a:srgbClr val="333333"/>
+            </a:solidFill>
+            <a:prstDash val="solid"/>
+          </a:ln>
+        </p:spPr>
+      </p:sp>
+      <p:sp>
+        <p:nvSpPr>
+          <p:cNvPr id="9" name="Text 5"/>
+          <p:cNvSpPr/>
+          <p:nvPr/>
+        </p:nvSpPr>
+        <p:spPr>
+          <a:xfrm>
+            <a:off x="868680" y="6172200"/>
+            <a:ext cx="7315200" cy="274320"/>
+          </a:xfrm>
+          <a:prstGeom prst="rect">
+            <a:avLst/>
+          </a:prstGeom>
+          <a:noFill/>
+          <a:ln/>
+        </p:spPr>
+        <p:txBody>
+          <a:bodyPr wrap="square" rtlCol="0" anchor="ctr"/>
+          <a:lstStyle/>
+          <a:p>
+            <a:pPr indent="0" marL="0">
+              <a:buNone/>
+            </a:pPr>
+            <a:r>
+              <a:rPr lang="en-US" sz="1000" spc="100" kern="0" dirty="0">
+                <a:solidFill>
+                  <a:srgbClr val="71839D"/>
+                </a:solidFill>
+                <a:latin typeface="Consolas" pitchFamily="34" charset="0"/>
+                <a:ea typeface="Consolas" pitchFamily="34" charset="-122"/>
+                <a:cs typeface="Consolas" pitchFamily="34" charset="-120"/>
+              </a:rPr>
+              <a:t>ZIP·0</a:t>
+            </a:r>
+            <a:endParaRPr lang="en-US" sz="1000" dirty="0"/>
+          </a:p>
+        </p:txBody>
+      </p:sp>
+      <p:sp>
+        <p:nvSpPr>
+          <p:cNvPr id="10" name="Text 6"/>
+          <p:cNvSpPr/>
+          <p:nvPr/>
+        </p:nvSpPr>
+        <p:spPr>
+          <a:xfrm>
+            <a:off x="10408615" y="6172200"/>
+            <a:ext cx="914400" cy="274320"/>
+          </a:xfrm>
+          <a:prstGeom prst="rect">
+            <a:avLst/>
+          </a:prstGeom>
+          <a:noFill/>
+          <a:ln/>
+        </p:spPr>
+        <p:txBody>
+          <a:bodyPr wrap="square" rtlCol="0" anchor="ctr"/>
+          <a:lstStyle/>
+          <a:p>
+            <a:pPr algn="r" indent="0" marL="0">
+              <a:buNone/>
+            </a:pPr>
+            <a:r>
+              <a:rPr lang="en-US" sz="1000" dirty="0">
+                <a:solidFill>
+                  <a:srgbClr val="71839D"/>
+                </a:solidFill>
+                <a:latin typeface="Consolas" pitchFamily="34" charset="0"/>
+                <a:ea typeface="Consolas" pitchFamily="34" charset="-122"/>
+                <a:cs typeface="Consolas" pitchFamily="34" charset="-120"/>
+              </a:rPr>
+              <a:t>08</a:t>
             </a:r>
             <a:endParaRPr lang="en-US" sz="1000" dirty="0"/>
           </a:p>

--- a/docs/assets/zip0-pitch.pptx
+++ b/docs/assets/zip0-pitch.pptx
@@ -17,8 +17,8 @@
   <p:notesMasterIdLst>
     <p:notesMasterId r:id="rId10"/>
   </p:notesMasterIdLst>
-  <p:sldSz cx="9144000" cy="5143500"/>
-  <p:notesSz cx="5143500" cy="9144000"/>
+  <p:sldSz cx="12191695" cy="6858000"/>
+  <p:notesSz cx="6858000" cy="12191695"/>
   <p:defaultTextStyle>
     <a:lvl1pPr marL="0" algn="l" defTabSz="914400" rtl="0" eaLnBrk="1" latinLnBrk="0" hangingPunct="1">
       <a:defRPr sz="1800" kern="1200">
